--- a/learn/assets/kosis-dikw-population-tourism-slides.pptx
+++ b/learn/assets/kosis-dikw-population-tourism-slides.pptx
@@ -14,6 +14,7 @@
     <p:sldId id="262" r:id="rId8"/>
     <p:sldId id="263" r:id="rId9"/>
     <p:sldId id="264" r:id="rId10"/>
+    <p:sldId id="265" r:id="rId16"/>
   </p:sldIdLst>
   <p:notesMasterIdLst>
     <p:notesMasterId r:id="rId11"/>
@@ -2056,6 +2057,160 @@
           </a:p>
         </p:txBody>
       </p:sp>
+    </p:spTree>
+  </p:cSld>
+  <p:clrMapOvr>
+    <a:masterClrMapping/>
+  </p:clrMapOvr>
+</p:sld>
+</file>
+
+<file path=ppt/slides/slide10.xml><?xml version="1.0" encoding="utf-8"?>
+<p:sld xmlns:a="http://schemas.openxmlformats.org/drawingml/2006/main" xmlns:p="http://schemas.openxmlformats.org/presentationml/2006/main" xmlns:r="http://schemas.openxmlformats.org/officeDocument/2006/relationships">
+  <p:cSld>
+    <p:bg>
+      <p:bgPr>
+        <a:solidFill>
+          <a:srgbClr val="FFFFFF"/>
+        </a:solidFill>
+        <a:effectLst/>
+      </p:bgPr>
+    </p:bg>
+    <p:spTree>
+      <p:nvGrpSpPr>
+        <p:cNvPr id="1" name=""/>
+        <p:cNvGrpSpPr/>
+        <p:nvPr/>
+      </p:nvGrpSpPr>
+      <p:grpSpPr/>
+      <p:sp>
+        <p:nvSpPr>
+          <p:cNvPr id="2" name="Rectangle 1"/>
+          <p:cNvSpPr/>
+          <p:nvPr/>
+        </p:nvSpPr>
+        <p:spPr>
+          <a:xfrm>
+            <a:off x="0" y="0"/>
+            <a:ext cx="12191695" cy="438912"/>
+          </a:xfrm>
+          <a:prstGeom prst="rect">
+            <a:avLst/>
+          </a:prstGeom>
+          <a:solidFill>
+            <a:srgbClr val="1C3E7A"/>
+          </a:solidFill>
+          <a:ln>
+            <a:noFill/>
+          </a:ln>
+        </p:spPr>
+        <p:style>
+          <a:lnRef idx="1">
+            <a:schemeClr val="accent1"/>
+          </a:lnRef>
+          <a:fillRef idx="3">
+            <a:schemeClr val="accent1"/>
+          </a:fillRef>
+          <a:effectRef idx="2">
+            <a:schemeClr val="accent1"/>
+          </a:effectRef>
+          <a:fontRef idx="minor">
+            <a:schemeClr val="lt1"/>
+          </a:fontRef>
+        </p:style>
+        <p:txBody>
+          <a:bodyPr rtlCol="0" anchor="ctr"/>
+          <a:lstStyle/>
+          <a:p>
+            <a:pPr algn="ctr"/>
+            <a:r>
+              <a:rPr sz="2200" b="1">
+                <a:solidFill>
+                  <a:srgbClr val="FFFFFF"/>
+                </a:solidFill>
+              </a:rPr>
+              <a:t>KOSIS 인구관계도로 보는 DIKW 모형 — 종합 시각자료</a:t>
+            </a:r>
+          </a:p>
+        </p:txBody>
+      </p:sp>
+      <p:sp>
+        <p:nvSpPr>
+          <p:cNvPr id="3" name="Rounded Rectangle 2"/>
+          <p:cNvSpPr/>
+          <p:nvPr/>
+        </p:nvSpPr>
+        <p:spPr>
+          <a:xfrm>
+            <a:off x="137160" y="6062472"/>
+            <a:ext cx="11917375" cy="777240"/>
+          </a:xfrm>
+          <a:prstGeom prst="roundRect">
+            <a:avLst/>
+          </a:prstGeom>
+          <a:solidFill>
+            <a:srgbClr val="F5F8FC"/>
+          </a:solidFill>
+          <a:ln w="15240">
+            <a:solidFill>
+              <a:srgbClr val="BFCDE2"/>
+            </a:solidFill>
+          </a:ln>
+        </p:spPr>
+        <p:style>
+          <a:lnRef idx="1">
+            <a:schemeClr val="accent1"/>
+          </a:lnRef>
+          <a:fillRef idx="3">
+            <a:schemeClr val="accent1"/>
+          </a:fillRef>
+          <a:effectRef idx="2">
+            <a:schemeClr val="accent1"/>
+          </a:effectRef>
+          <a:fontRef idx="minor">
+            <a:schemeClr val="lt1"/>
+          </a:fontRef>
+        </p:style>
+        <p:txBody>
+          <a:bodyPr rtlCol="0" anchor="ctr" wrap="square" lIns="127000" rIns="127000" tIns="76200" bIns="50800"/>
+          <a:lstStyle/>
+          <a:p>
+            <a:pPr algn="ctr"/>
+            <a:r>
+              <a:rPr sz="1250">
+                <a:solidFill>
+                  <a:srgbClr val="2D3748"/>
+                </a:solidFill>
+              </a:rPr>
+              <a:t>대본: 이 슬라이드는 앞서 설명한 내용을 한 화면에 요약한 자료입니다. 왼쪽의 Data에서 시작해 Information, Knowledge, Wisdom으로 올라가면서, 인구 데이터가 단순 수치를 넘어 관광정책과 지역전략의 판단 근거로 전환되는 과정을 시각적으로 보여줍니다.</a:t>
+            </a:r>
+          </a:p>
+        </p:txBody>
+      </p:sp>
+      <p:pic>
+        <p:nvPicPr>
+          <p:cNvPr id="4" name="Picture 3" descr="image.png"/>
+          <p:cNvPicPr>
+            <a:picLocks noChangeAspect="1"/>
+          </p:cNvPicPr>
+          <p:nvPr/>
+        </p:nvPicPr>
+        <p:blipFill>
+          <a:blip r:embed="rId2"/>
+          <a:stretch>
+            <a:fillRect/>
+          </a:stretch>
+        </p:blipFill>
+        <p:spPr>
+          <a:xfrm>
+            <a:off x="2798521" y="512064"/>
+            <a:ext cx="6594652" cy="5495544"/>
+          </a:xfrm>
+          <a:prstGeom prst="rect">
+            <a:avLst/>
+          </a:prstGeom>
+        </p:spPr>
+      </p:pic>
     </p:spTree>
   </p:cSld>
   <p:clrMapOvr>
